--- a/Predictive_Modeling_Lunch_Learn.pptx
+++ b/Predictive_Modeling_Lunch_Learn.pptx
@@ -2556,8 +2556,8 @@
         </p:nvSpPr>
         <p:spPr>
           <a:xfrm>
-            <a:off x="749808" y="1097280"/>
-            <a:ext cx="7772400" cy="777240"/>
+            <a:off x="749807" y="1744050"/>
+            <a:ext cx="8029919" cy="777240"/>
           </a:xfrm>
           <a:prstGeom prst="rect">
             <a:avLst/>
@@ -2581,7 +2581,7 @@
                 <a:ea typeface="Calibri" pitchFamily="34" charset="-122"/>
                 <a:cs typeface="Calibri" pitchFamily="34" charset="-120"/>
               </a:rPr>
-              <a:t>Statistical Modeling</a:t>
+              <a:t>Statistical Modeling for Campaigns</a:t>
             </a:r>
             <a:endParaRPr lang="en-US" sz="4400" dirty="0"/>
           </a:p>
@@ -2589,14 +2589,41 @@
       </p:sp>
       <p:sp>
         <p:nvSpPr>
-          <p:cNvPr id="6" name="Text 4"/>
-          <p:cNvSpPr/>
-          <p:nvPr/>
-        </p:nvSpPr>
-        <p:spPr>
-          <a:xfrm>
-            <a:off x="749808" y="1874520"/>
-            <a:ext cx="7772400" cy="685800"/>
+          <p:cNvPr id="7" name="Shape 5"/>
+          <p:cNvSpPr/>
+          <p:nvPr/>
+        </p:nvSpPr>
+        <p:spPr>
+          <a:xfrm>
+            <a:off x="749808" y="2651760"/>
+            <a:ext cx="3657600" cy="41148"/>
+          </a:xfrm>
+          <a:prstGeom prst="rect">
+            <a:avLst/>
+          </a:prstGeom>
+          <a:solidFill>
+            <a:srgbClr val="4C6EF5"/>
+          </a:solidFill>
+          <a:ln/>
+        </p:spPr>
+        <p:txBody>
+          <a:bodyPr/>
+          <a:lstStyle/>
+          <a:p>
+            <a:endParaRPr lang="en-US"/>
+          </a:p>
+        </p:txBody>
+      </p:sp>
+      <p:sp>
+        <p:nvSpPr>
+          <p:cNvPr id="8" name="Text 6"/>
+          <p:cNvSpPr/>
+          <p:nvPr/>
+        </p:nvSpPr>
+        <p:spPr>
+          <a:xfrm>
+            <a:off x="749808" y="2788920"/>
+            <a:ext cx="7891272" cy="731520"/>
           </a:xfrm>
           <a:prstGeom prst="rect">
             <a:avLst/>
@@ -2612,7 +2639,7 @@
               <a:buNone/>
             </a:pPr>
             <a:r>
-              <a:rPr lang="en-US" sz="3600" b="1" dirty="0">
+              <a:rPr lang="en-US" sz="1700" i="1" dirty="0">
                 <a:solidFill>
                   <a:srgbClr val="CADCFC"/>
                 </a:solidFill>
@@ -2620,73 +2647,7 @@
                 <a:ea typeface="Calibri" pitchFamily="34" charset="-122"/>
                 <a:cs typeface="Calibri" pitchFamily="34" charset="-120"/>
               </a:rPr>
-              <a:t>Lunch &amp; Learn</a:t>
-            </a:r>
-            <a:endParaRPr lang="en-US" sz="3600" dirty="0"/>
-          </a:p>
-        </p:txBody>
-      </p:sp>
-      <p:sp>
-        <p:nvSpPr>
-          <p:cNvPr id="7" name="Shape 5"/>
-          <p:cNvSpPr/>
-          <p:nvPr/>
-        </p:nvSpPr>
-        <p:spPr>
-          <a:xfrm>
-            <a:off x="749808" y="2651760"/>
-            <a:ext cx="3657600" cy="41148"/>
-          </a:xfrm>
-          <a:prstGeom prst="rect">
-            <a:avLst/>
-          </a:prstGeom>
-          <a:solidFill>
-            <a:srgbClr val="4C6EF5"/>
-          </a:solidFill>
-          <a:ln/>
-        </p:spPr>
-        <p:txBody>
-          <a:bodyPr/>
-          <a:lstStyle/>
-          <a:p>
-            <a:endParaRPr lang="en-US"/>
-          </a:p>
-        </p:txBody>
-      </p:sp>
-      <p:sp>
-        <p:nvSpPr>
-          <p:cNvPr id="8" name="Text 6"/>
-          <p:cNvSpPr/>
-          <p:nvPr/>
-        </p:nvSpPr>
-        <p:spPr>
-          <a:xfrm>
-            <a:off x="749808" y="2788920"/>
-            <a:ext cx="7772400" cy="731520"/>
-          </a:xfrm>
-          <a:prstGeom prst="rect">
-            <a:avLst/>
-          </a:prstGeom>
-          <a:noFill/>
-          <a:ln/>
-        </p:spPr>
-        <p:txBody>
-          <a:bodyPr wrap="square" lIns="0" tIns="0" rIns="0" bIns="0" rtlCol="0" anchor="ctr"/>
-          <a:lstStyle/>
-          <a:p>
-            <a:pPr marL="0" indent="0">
-              <a:buNone/>
-            </a:pPr>
-            <a:r>
-              <a:rPr lang="en-US" sz="1700" i="1" dirty="0">
-                <a:solidFill>
-                  <a:srgbClr val="CADCFC"/>
-                </a:solidFill>
-                <a:latin typeface="Calibri" pitchFamily="34" charset="0"/>
-                <a:ea typeface="Calibri" pitchFamily="34" charset="-122"/>
-                <a:cs typeface="Calibri" pitchFamily="34" charset="-120"/>
-              </a:rPr>
-              <a:t>Using Statistics and Data Science Techniques to Answer Campaign Questions</a:t>
+              <a:t>An Intro Into Using Statistics and Data Science Techniques to Answer Campaign Questions</a:t>
             </a:r>
             <a:endParaRPr lang="en-US" sz="1700" dirty="0"/>
           </a:p>
@@ -18610,7 +18571,30 @@
                 <a:ea typeface="Calibri" pitchFamily="34" charset="-122"/>
                 <a:cs typeface="Calibri" pitchFamily="34" charset="-120"/>
               </a:rPr>
-              <a:t>All code and a write up is available on my GitHub page linked HERE.</a:t>
+              <a:t>All code and a write up is available on my GitHub page linked </a:t>
+            </a:r>
+            <a:r>
+              <a:rPr lang="en-US" sz="1700" i="1" dirty="0">
+                <a:solidFill>
+                  <a:srgbClr val="CADCFC"/>
+                </a:solidFill>
+                <a:latin typeface="Calibri" pitchFamily="34" charset="0"/>
+                <a:ea typeface="Calibri" pitchFamily="34" charset="-122"/>
+                <a:cs typeface="Calibri" pitchFamily="34" charset="-120"/>
+                <a:hlinkClick r:id="rId3"/>
+              </a:rPr>
+              <a:t>HERE</a:t>
+            </a:r>
+            <a:r>
+              <a:rPr lang="en-US" sz="1700" i="1" dirty="0">
+                <a:solidFill>
+                  <a:srgbClr val="CADCFC"/>
+                </a:solidFill>
+                <a:latin typeface="Calibri" pitchFamily="34" charset="0"/>
+                <a:ea typeface="Calibri" pitchFamily="34" charset="-122"/>
+                <a:cs typeface="Calibri" pitchFamily="34" charset="-120"/>
+              </a:rPr>
+              <a:t>.</a:t>
             </a:r>
             <a:endParaRPr lang="en-US" sz="1700" dirty="0"/>
           </a:p>

--- a/Predictive_Modeling_Lunch_Learn.pptx
+++ b/Predictive_Modeling_Lunch_Learn.pptx
@@ -6266,7 +6266,7 @@
                 <a:ea typeface="Calibri" pitchFamily="34" charset="-122"/>
                 <a:cs typeface="Calibri" pitchFamily="34" charset="-120"/>
               </a:rPr>
-              <a:t>Do Ohio counties naturally sort into distinct political types based on how Republican they lean and how engaged their voters are?</a:t>
+              <a:t>Do Ohio counties naturally sort into distinct political types based on how Trump-y they lean and how engaged their voters are?</a:t>
             </a:r>
             <a:endParaRPr lang="en-US" sz="1200" dirty="0"/>
           </a:p>
@@ -8827,9 +8827,6 @@
           <a:bodyPr wrap="square" lIns="0" tIns="0" rIns="0" bIns="0" rtlCol="0" anchor="ctr"/>
           <a:lstStyle/>
           <a:p>
-            <a:pPr marL="0" indent="0">
-              <a:buNone/>
-            </a:pPr>
             <a:r>
               <a:rPr lang="en-US" sz="1400" dirty="0">
                 <a:solidFill>
@@ -8839,7 +8836,7 @@
                 <a:ea typeface="Calibri" pitchFamily="34" charset="-122"/>
                 <a:cs typeface="Calibri" pitchFamily="34" charset="-120"/>
               </a:rPr>
-              <a:t>~925 Ohio voters  ·  Demographics  ·  Trump favorability  ·  Issue 1 vote</a:t>
+              <a:t>Issue 1 campaign  ·  2023 General</a:t>
             </a:r>
             <a:endParaRPr lang="en-US" sz="1400" dirty="0"/>
           </a:p>
@@ -9077,7 +9074,7 @@
                 <a:ea typeface="Calibri" pitchFamily="34" charset="-122"/>
                 <a:cs typeface="Calibri" pitchFamily="34" charset="-120"/>
               </a:rPr>
-              <a:t>A post-election survey of Ohio voters with demographic characteristics and self-reported answers on two political outcomes.</a:t>
+              <a:t>A post-election survey of Ohio voters with demographic characteristics and self-reported answers on two political questions: Trump image and Issue 1 Vote.</a:t>
             </a:r>
             <a:endParaRPr lang="en-US" sz="1100" dirty="0"/>
           </a:p>
@@ -9143,7 +9140,7 @@
                 <a:ea typeface="Calibri" pitchFamily="34" charset="-122"/>
                 <a:cs typeface="Calibri" pitchFamily="34" charset="-120"/>
               </a:rPr>
-              <a:t>~925</a:t>
+              <a:t>925</a:t>
             </a:r>
             <a:endParaRPr lang="en-US" sz="2800" dirty="0"/>
           </a:p>
@@ -10135,7 +10132,7 @@
         <p:spPr>
           <a:xfrm>
             <a:off x="6419088" y="1481328"/>
-            <a:ext cx="2240280" cy="1234440"/>
+            <a:ext cx="2240280" cy="923544"/>
           </a:xfrm>
           <a:prstGeom prst="rect">
             <a:avLst/>
@@ -10219,7 +10216,7 @@
             <a:r>
               <a:rPr lang="en-US" sz="1100" b="1" dirty="0">
                 <a:solidFill>
-                  <a:srgbClr val="DC2626"/>
+                  <a:schemeClr val="accent1"/>
                 </a:solidFill>
                 <a:latin typeface="Calibri" pitchFamily="34" charset="0"/>
                 <a:ea typeface="Calibri" pitchFamily="34" charset="-122"/>
@@ -10241,7 +10238,7 @@
             <a:r>
               <a:rPr lang="en-US" sz="1100" b="1" dirty="0">
                 <a:solidFill>
-                  <a:srgbClr val="6B7280"/>
+                  <a:schemeClr val="accent1"/>
                 </a:solidFill>
                 <a:latin typeface="Calibri" pitchFamily="34" charset="0"/>
                 <a:ea typeface="Calibri" pitchFamily="34" charset="-122"/>
@@ -10249,7 +10246,11 @@
               </a:rPr>
               <a:t>Unfavorable</a:t>
             </a:r>
-            <a:endParaRPr lang="en-US" sz="1100" dirty="0"/>
+            <a:endParaRPr lang="en-US" sz="1100" dirty="0">
+              <a:solidFill>
+                <a:schemeClr val="accent1"/>
+              </a:solidFill>
+            </a:endParaRPr>
           </a:p>
         </p:txBody>
       </p:sp>
@@ -10277,17 +10278,6 @@
             <a:pPr marL="0" indent="0">
               <a:buNone/>
             </a:pPr>
-            <a:r>
-              <a:rPr lang="en-US" sz="900" i="1" dirty="0">
-                <a:solidFill>
-                  <a:srgbClr val="64748B"/>
-                </a:solidFill>
-                <a:latin typeface="Calibri" pitchFamily="34" charset="0"/>
-                <a:ea typeface="Calibri" pitchFamily="34" charset="-122"/>
-                <a:cs typeface="Calibri" pitchFamily="34" charset="-120"/>
-              </a:rPr>
-              <a:t>Binary classification</a:t>
-            </a:r>
             <a:endParaRPr lang="en-US" sz="900" dirty="0"/>
           </a:p>
         </p:txBody>
@@ -10301,7 +10291,7 @@
         <p:spPr>
           <a:xfrm>
             <a:off x="6419088" y="2852928"/>
-            <a:ext cx="2240280" cy="1234440"/>
+            <a:ext cx="2240280" cy="923544"/>
           </a:xfrm>
           <a:prstGeom prst="rect">
             <a:avLst/>
@@ -10385,7 +10375,7 @@
             <a:r>
               <a:rPr lang="en-US" sz="1100" b="1" dirty="0">
                 <a:solidFill>
-                  <a:srgbClr val="16A34A"/>
+                  <a:schemeClr val="accent1"/>
                 </a:solidFill>
                 <a:latin typeface="Calibri" pitchFamily="34" charset="0"/>
                 <a:ea typeface="Calibri" pitchFamily="34" charset="-122"/>
@@ -10396,18 +10386,29 @@
             <a:r>
               <a:rPr lang="en-US" sz="1100" dirty="0">
                 <a:solidFill>
+                  <a:schemeClr val="accent1"/>
+                </a:solidFill>
+                <a:latin typeface="Calibri" pitchFamily="34" charset="0"/>
+                <a:ea typeface="Calibri" pitchFamily="34" charset="-122"/>
+                <a:cs typeface="Calibri" pitchFamily="34" charset="-120"/>
+              </a:rPr>
+              <a:t>  </a:t>
+            </a:r>
+            <a:r>
+              <a:rPr lang="en-US" sz="1100" dirty="0">
+                <a:solidFill>
                   <a:srgbClr val="2D3748"/>
                 </a:solidFill>
                 <a:latin typeface="Calibri" pitchFamily="34" charset="0"/>
                 <a:ea typeface="Calibri" pitchFamily="34" charset="-122"/>
                 <a:cs typeface="Calibri" pitchFamily="34" charset="-120"/>
               </a:rPr>
-              <a:t>  vs.  </a:t>
+              <a:t>vs.  </a:t>
             </a:r>
             <a:r>
               <a:rPr lang="en-US" sz="1100" b="1" dirty="0">
                 <a:solidFill>
-                  <a:srgbClr val="6B7280"/>
+                  <a:schemeClr val="accent1"/>
                 </a:solidFill>
                 <a:latin typeface="Calibri" pitchFamily="34" charset="0"/>
                 <a:ea typeface="Calibri" pitchFamily="34" charset="-122"/>
@@ -10415,7 +10416,11 @@
               </a:rPr>
               <a:t>Voted No</a:t>
             </a:r>
-            <a:endParaRPr lang="en-US" sz="1100" dirty="0"/>
+            <a:endParaRPr lang="en-US" sz="1100" dirty="0">
+              <a:solidFill>
+                <a:schemeClr val="accent1"/>
+              </a:solidFill>
+            </a:endParaRPr>
           </a:p>
         </p:txBody>
       </p:sp>
@@ -10443,17 +10448,6 @@
             <a:pPr marL="0" indent="0">
               <a:buNone/>
             </a:pPr>
-            <a:r>
-              <a:rPr lang="en-US" sz="900" i="1" dirty="0">
-                <a:solidFill>
-                  <a:srgbClr val="64748B"/>
-                </a:solidFill>
-                <a:latin typeface="Calibri" pitchFamily="34" charset="0"/>
-                <a:ea typeface="Calibri" pitchFamily="34" charset="-122"/>
-                <a:cs typeface="Calibri" pitchFamily="34" charset="-120"/>
-              </a:rPr>
-              <a:t>Binary classification</a:t>
-            </a:r>
             <a:endParaRPr lang="en-US" sz="900" dirty="0"/>
           </a:p>
         </p:txBody>
@@ -11797,7 +11791,7 @@
                 <a:ea typeface="Calibri" pitchFamily="34" charset="-122"/>
                 <a:cs typeface="Calibri" pitchFamily="34" charset="-120"/>
               </a:rPr>
-              <a:t>Gain = how much each feature helped make correct predictions. Notice how the feature ranking shifts between the two models — that gap is the interesting finding.</a:t>
+              <a:t>Gain = how much each feature helped make correct predictions. Notice how the feature ranking shifts between the two models</a:t>
             </a:r>
             <a:endParaRPr lang="en-US" sz="1100" dirty="0"/>
           </a:p>
@@ -12074,49 +12068,75 @@
                 <a:ea typeface="Calibri" pitchFamily="34" charset="-122"/>
                 <a:cs typeface="Calibri" pitchFamily="34" charset="-120"/>
               </a:rPr>
-              <a:t>overall</a:t>
+              <a:t>Overall</a:t>
+            </a:r>
+            <a:r>
+              <a:rPr lang="en-US" sz="1000" dirty="0"/>
+              <a:t> </a:t>
+            </a:r>
+            <a:r>
+              <a:rPr lang="en-US" sz="1000" dirty="0">
+                <a:solidFill>
+                  <a:srgbClr val="64748B"/>
+                </a:solidFill>
+                <a:latin typeface="Calibri" pitchFamily="34" charset="0"/>
+                <a:ea typeface="Calibri" pitchFamily="34" charset="-122"/>
+                <a:cs typeface="Calibri" pitchFamily="34" charset="-120"/>
+              </a:rPr>
+              <a:t>accuracy</a:t>
             </a:r>
             <a:endParaRPr lang="en-US" sz="1000" dirty="0"/>
           </a:p>
+        </p:txBody>
+      </p:sp>
+      <p:sp>
+        <p:nvSpPr>
+          <p:cNvPr id="9" name="Text 7"/>
+          <p:cNvSpPr/>
+          <p:nvPr/>
+        </p:nvSpPr>
+        <p:spPr>
+          <a:xfrm>
+            <a:off x="457200" y="2761488"/>
+            <a:ext cx="3657600" cy="1005840"/>
+          </a:xfrm>
+          <a:prstGeom prst="rect">
+            <a:avLst/>
+          </a:prstGeom>
+          <a:noFill/>
+          <a:ln/>
+        </p:spPr>
+        <p:txBody>
+          <a:bodyPr wrap="square" lIns="0" tIns="0" rIns="0" bIns="0" rtlCol="0" anchor="ctr"/>
+          <a:lstStyle/>
           <a:p>
             <a:pPr marL="0" indent="0">
               <a:buNone/>
             </a:pPr>
             <a:r>
-              <a:rPr lang="en-US" sz="1000" dirty="0">
-                <a:solidFill>
-                  <a:srgbClr val="64748B"/>
-                </a:solidFill>
-                <a:latin typeface="Calibri" pitchFamily="34" charset="0"/>
-                <a:ea typeface="Calibri" pitchFamily="34" charset="-122"/>
-                <a:cs typeface="Calibri" pitchFamily="34" charset="-120"/>
-              </a:rPr>
-              <a:t>accuracy</a:t>
-            </a:r>
-            <a:endParaRPr lang="en-US" sz="1000" dirty="0"/>
-          </a:p>
-        </p:txBody>
-      </p:sp>
-      <p:sp>
-        <p:nvSpPr>
-          <p:cNvPr id="9" name="Text 7"/>
-          <p:cNvSpPr/>
-          <p:nvPr/>
-        </p:nvSpPr>
-        <p:spPr>
-          <a:xfrm>
-            <a:off x="457200" y="2761488"/>
-            <a:ext cx="3657600" cy="1005840"/>
-          </a:xfrm>
-          <a:prstGeom prst="rect">
-            <a:avLst/>
-          </a:prstGeom>
-          <a:noFill/>
-          <a:ln/>
-        </p:spPr>
-        <p:txBody>
-          <a:bodyPr wrap="square" lIns="0" tIns="0" rIns="0" bIns="0" rtlCol="0" anchor="ctr"/>
-          <a:lstStyle/>
+              <a:rPr lang="en-US" sz="1200" b="1" dirty="0">
+                <a:solidFill>
+                  <a:srgbClr val="22C55E"/>
+                </a:solidFill>
+                <a:latin typeface="Calibri" pitchFamily="34" charset="0"/>
+                <a:ea typeface="Calibri" pitchFamily="34" charset="-122"/>
+                <a:cs typeface="Calibri" pitchFamily="34" charset="-120"/>
+              </a:rPr>
+              <a:t>87% </a:t>
+            </a:r>
+            <a:r>
+              <a:rPr lang="en-US" sz="1200" dirty="0">
+                <a:solidFill>
+                  <a:srgbClr val="2D3748"/>
+                </a:solidFill>
+                <a:latin typeface="Calibri" pitchFamily="34" charset="0"/>
+                <a:ea typeface="Calibri" pitchFamily="34" charset="-122"/>
+                <a:cs typeface="Calibri" pitchFamily="34" charset="-120"/>
+              </a:rPr>
+              <a:t>catch rate — Unfavorable</a:t>
+            </a:r>
+            <a:endParaRPr lang="en-US" sz="1200" dirty="0"/>
+          </a:p>
           <a:p>
             <a:pPr marL="0" indent="0">
               <a:buNone/>
@@ -12124,13 +12144,13 @@
             <a:r>
               <a:rPr lang="en-US" sz="1200" b="1" dirty="0">
                 <a:solidFill>
-                  <a:srgbClr val="22C55E"/>
-                </a:solidFill>
-                <a:latin typeface="Calibri" pitchFamily="34" charset="0"/>
-                <a:ea typeface="Calibri" pitchFamily="34" charset="-122"/>
-                <a:cs typeface="Calibri" pitchFamily="34" charset="-120"/>
-              </a:rPr>
-              <a:t>87% </a:t>
+                  <a:srgbClr val="EF4444"/>
+                </a:solidFill>
+                <a:latin typeface="Calibri" pitchFamily="34" charset="0"/>
+                <a:ea typeface="Calibri" pitchFamily="34" charset="-122"/>
+                <a:cs typeface="Calibri" pitchFamily="34" charset="-120"/>
+              </a:rPr>
+              <a:t>69% </a:t>
             </a:r>
             <a:r>
               <a:rPr lang="en-US" sz="1200" dirty="0">
@@ -12141,63 +12161,7 @@
                 <a:ea typeface="Calibri" pitchFamily="34" charset="-122"/>
                 <a:cs typeface="Calibri" pitchFamily="34" charset="-120"/>
               </a:rPr>
-              <a:t>catch rate — Unfavorable</a:t>
-            </a:r>
-            <a:endParaRPr lang="en-US" sz="1200" dirty="0"/>
-          </a:p>
-          <a:p>
-            <a:pPr marL="0" indent="0">
-              <a:buNone/>
-            </a:pPr>
-            <a:r>
-              <a:rPr lang="en-US" sz="1200" b="1" dirty="0">
-                <a:solidFill>
-                  <a:srgbClr val="EF4444"/>
-                </a:solidFill>
-                <a:latin typeface="Calibri" pitchFamily="34" charset="0"/>
-                <a:ea typeface="Calibri" pitchFamily="34" charset="-122"/>
-                <a:cs typeface="Calibri" pitchFamily="34" charset="-120"/>
-              </a:rPr>
-              <a:t>69% </a:t>
-            </a:r>
-            <a:r>
-              <a:rPr lang="en-US" sz="1200" dirty="0">
-                <a:solidFill>
-                  <a:srgbClr val="2D3748"/>
-                </a:solidFill>
-                <a:latin typeface="Calibri" pitchFamily="34" charset="0"/>
-                <a:ea typeface="Calibri" pitchFamily="34" charset="-122"/>
-                <a:cs typeface="Calibri" pitchFamily="34" charset="-120"/>
-              </a:rPr>
               <a:t>catch rate — Favorable</a:t>
-            </a:r>
-            <a:endParaRPr lang="en-US" sz="1200" dirty="0"/>
-          </a:p>
-          <a:p>
-            <a:pPr marL="0" indent="0">
-              <a:buNone/>
-            </a:pPr>
-            <a:r>
-              <a:rPr lang="en-US" sz="1200" b="1" dirty="0">
-                <a:solidFill>
-                  <a:srgbClr val="2D3748"/>
-                </a:solidFill>
-                <a:latin typeface="Calibri" pitchFamily="34" charset="0"/>
-                <a:ea typeface="Calibri" pitchFamily="34" charset="-122"/>
-                <a:cs typeface="Calibri" pitchFamily="34" charset="-120"/>
-              </a:rPr>
-              <a:t>Kappa 0.56 </a:t>
-            </a:r>
-            <a:r>
-              <a:rPr lang="en-US" sz="1200" dirty="0">
-                <a:solidFill>
-                  <a:srgbClr val="2D3748"/>
-                </a:solidFill>
-                <a:latin typeface="Calibri" pitchFamily="34" charset="0"/>
-                <a:ea typeface="Calibri" pitchFamily="34" charset="-122"/>
-                <a:cs typeface="Calibri" pitchFamily="34" charset="-120"/>
-              </a:rPr>
-              <a:t>— moderate agreement</a:t>
             </a:r>
             <a:endParaRPr lang="en-US" sz="1200" dirty="0"/>
           </a:p>
@@ -12414,49 +12378,75 @@
                 <a:ea typeface="Calibri" pitchFamily="34" charset="-122"/>
                 <a:cs typeface="Calibri" pitchFamily="34" charset="-120"/>
               </a:rPr>
-              <a:t>overall</a:t>
+              <a:t>Overall</a:t>
+            </a:r>
+            <a:r>
+              <a:rPr lang="en-US" sz="1000" dirty="0"/>
+              <a:t> </a:t>
+            </a:r>
+            <a:r>
+              <a:rPr lang="en-US" sz="1000" dirty="0">
+                <a:solidFill>
+                  <a:srgbClr val="64748B"/>
+                </a:solidFill>
+                <a:latin typeface="Calibri" pitchFamily="34" charset="0"/>
+                <a:ea typeface="Calibri" pitchFamily="34" charset="-122"/>
+                <a:cs typeface="Calibri" pitchFamily="34" charset="-120"/>
+              </a:rPr>
+              <a:t>accuracy</a:t>
             </a:r>
             <a:endParaRPr lang="en-US" sz="1000" dirty="0"/>
           </a:p>
+        </p:txBody>
+      </p:sp>
+      <p:sp>
+        <p:nvSpPr>
+          <p:cNvPr id="16" name="Text 14"/>
+          <p:cNvSpPr/>
+          <p:nvPr/>
+        </p:nvSpPr>
+        <p:spPr>
+          <a:xfrm>
+            <a:off x="4983480" y="2761488"/>
+            <a:ext cx="3657600" cy="1005840"/>
+          </a:xfrm>
+          <a:prstGeom prst="rect">
+            <a:avLst/>
+          </a:prstGeom>
+          <a:noFill/>
+          <a:ln/>
+        </p:spPr>
+        <p:txBody>
+          <a:bodyPr wrap="square" lIns="0" tIns="0" rIns="0" bIns="0" rtlCol="0" anchor="ctr"/>
+          <a:lstStyle/>
           <a:p>
             <a:pPr marL="0" indent="0">
               <a:buNone/>
             </a:pPr>
             <a:r>
-              <a:rPr lang="en-US" sz="1000" dirty="0">
-                <a:solidFill>
-                  <a:srgbClr val="64748B"/>
-                </a:solidFill>
-                <a:latin typeface="Calibri" pitchFamily="34" charset="0"/>
-                <a:ea typeface="Calibri" pitchFamily="34" charset="-122"/>
-                <a:cs typeface="Calibri" pitchFamily="34" charset="-120"/>
-              </a:rPr>
-              <a:t>accuracy</a:t>
-            </a:r>
-            <a:endParaRPr lang="en-US" sz="1000" dirty="0"/>
-          </a:p>
-        </p:txBody>
-      </p:sp>
-      <p:sp>
-        <p:nvSpPr>
-          <p:cNvPr id="16" name="Text 14"/>
-          <p:cNvSpPr/>
-          <p:nvPr/>
-        </p:nvSpPr>
-        <p:spPr>
-          <a:xfrm>
-            <a:off x="4983480" y="2761488"/>
-            <a:ext cx="3657600" cy="1005840"/>
-          </a:xfrm>
-          <a:prstGeom prst="rect">
-            <a:avLst/>
-          </a:prstGeom>
-          <a:noFill/>
-          <a:ln/>
-        </p:spPr>
-        <p:txBody>
-          <a:bodyPr wrap="square" lIns="0" tIns="0" rIns="0" bIns="0" rtlCol="0" anchor="ctr"/>
-          <a:lstStyle/>
+              <a:rPr lang="en-US" sz="1200" b="1" dirty="0">
+                <a:solidFill>
+                  <a:srgbClr val="22C55E"/>
+                </a:solidFill>
+                <a:latin typeface="Calibri" pitchFamily="34" charset="0"/>
+                <a:ea typeface="Calibri" pitchFamily="34" charset="-122"/>
+                <a:cs typeface="Calibri" pitchFamily="34" charset="-120"/>
+              </a:rPr>
+              <a:t>84% </a:t>
+            </a:r>
+            <a:r>
+              <a:rPr lang="en-US" sz="1200" dirty="0">
+                <a:solidFill>
+                  <a:srgbClr val="2D3748"/>
+                </a:solidFill>
+                <a:latin typeface="Calibri" pitchFamily="34" charset="0"/>
+                <a:ea typeface="Calibri" pitchFamily="34" charset="-122"/>
+                <a:cs typeface="Calibri" pitchFamily="34" charset="-120"/>
+              </a:rPr>
+              <a:t>catch rate — Voted Yes</a:t>
+            </a:r>
+            <a:endParaRPr lang="en-US" sz="1200" dirty="0"/>
+          </a:p>
           <a:p>
             <a:pPr marL="0" indent="0">
               <a:buNone/>
@@ -12464,13 +12454,13 @@
             <a:r>
               <a:rPr lang="en-US" sz="1200" b="1" dirty="0">
                 <a:solidFill>
-                  <a:srgbClr val="22C55E"/>
-                </a:solidFill>
-                <a:latin typeface="Calibri" pitchFamily="34" charset="0"/>
-                <a:ea typeface="Calibri" pitchFamily="34" charset="-122"/>
-                <a:cs typeface="Calibri" pitchFamily="34" charset="-120"/>
-              </a:rPr>
-              <a:t>84% </a:t>
+                  <a:srgbClr val="3B82F6"/>
+                </a:solidFill>
+                <a:latin typeface="Calibri" pitchFamily="34" charset="0"/>
+                <a:ea typeface="Calibri" pitchFamily="34" charset="-122"/>
+                <a:cs typeface="Calibri" pitchFamily="34" charset="-120"/>
+              </a:rPr>
+              <a:t>77% </a:t>
             </a:r>
             <a:r>
               <a:rPr lang="en-US" sz="1200" dirty="0">
@@ -12481,63 +12471,7 @@
                 <a:ea typeface="Calibri" pitchFamily="34" charset="-122"/>
                 <a:cs typeface="Calibri" pitchFamily="34" charset="-120"/>
               </a:rPr>
-              <a:t>catch rate — Voted Yes</a:t>
-            </a:r>
-            <a:endParaRPr lang="en-US" sz="1200" dirty="0"/>
-          </a:p>
-          <a:p>
-            <a:pPr marL="0" indent="0">
-              <a:buNone/>
-            </a:pPr>
-            <a:r>
-              <a:rPr lang="en-US" sz="1200" b="1" dirty="0">
-                <a:solidFill>
-                  <a:srgbClr val="3B82F6"/>
-                </a:solidFill>
-                <a:latin typeface="Calibri" pitchFamily="34" charset="0"/>
-                <a:ea typeface="Calibri" pitchFamily="34" charset="-122"/>
-                <a:cs typeface="Calibri" pitchFamily="34" charset="-120"/>
-              </a:rPr>
-              <a:t>77% </a:t>
-            </a:r>
-            <a:r>
-              <a:rPr lang="en-US" sz="1200" dirty="0">
-                <a:solidFill>
-                  <a:srgbClr val="2D3748"/>
-                </a:solidFill>
-                <a:latin typeface="Calibri" pitchFamily="34" charset="0"/>
-                <a:ea typeface="Calibri" pitchFamily="34" charset="-122"/>
-                <a:cs typeface="Calibri" pitchFamily="34" charset="-120"/>
-              </a:rPr>
               <a:t>catch rate — Voted No</a:t>
-            </a:r>
-            <a:endParaRPr lang="en-US" sz="1200" dirty="0"/>
-          </a:p>
-          <a:p>
-            <a:pPr marL="0" indent="0">
-              <a:buNone/>
-            </a:pPr>
-            <a:r>
-              <a:rPr lang="en-US" sz="1200" b="1" dirty="0">
-                <a:solidFill>
-                  <a:srgbClr val="2D3748"/>
-                </a:solidFill>
-                <a:latin typeface="Calibri" pitchFamily="34" charset="0"/>
-                <a:ea typeface="Calibri" pitchFamily="34" charset="-122"/>
-                <a:cs typeface="Calibri" pitchFamily="34" charset="-120"/>
-              </a:rPr>
-              <a:t>Kappa 0.61 </a:t>
-            </a:r>
-            <a:r>
-              <a:rPr lang="en-US" sz="1200" dirty="0">
-                <a:solidFill>
-                  <a:srgbClr val="2D3748"/>
-                </a:solidFill>
-                <a:latin typeface="Calibri" pitchFamily="34" charset="0"/>
-                <a:ea typeface="Calibri" pitchFamily="34" charset="-122"/>
-                <a:cs typeface="Calibri" pitchFamily="34" charset="-120"/>
-              </a:rPr>
-              <a:t>— moderate-to-good agreement</a:t>
             </a:r>
             <a:endParaRPr lang="en-US" sz="1200" dirty="0"/>
           </a:p>
@@ -12919,7 +12853,7 @@
                 <a:ea typeface="Calibri" pitchFamily="34" charset="-122"/>
                 <a:cs typeface="Calibri" pitchFamily="34" charset="-120"/>
               </a:rPr>
-              <a:t>Given how much was spent on each Issue 1 ad, how much more or less memorable was it than expected?</a:t>
+              <a:t>Given how much was spent on each ad, how much more or less memorable was it than expected?</a:t>
             </a:r>
             <a:endParaRPr lang="en-US" sz="1100" dirty="0"/>
           </a:p>
@@ -12958,7 +12892,23 @@
                 <a:ea typeface="Calibri" pitchFamily="34" charset="-122"/>
                 <a:cs typeface="Calibri" pitchFamily="34" charset="-120"/>
               </a:rPr>
-              <a:t>Post-mortem for an advocacy group · 2023 General Election</a:t>
+              <a:t>Ohio Voter Survey + Ad Spending Data</a:t>
+            </a:r>
+          </a:p>
+          <a:p>
+            <a:pPr marL="0" indent="0">
+              <a:buNone/>
+            </a:pPr>
+            <a:r>
+              <a:rPr lang="en-US" sz="900" dirty="0">
+                <a:solidFill>
+                  <a:srgbClr val="64748B"/>
+                </a:solidFill>
+                <a:latin typeface="Calibri" pitchFamily="34" charset="0"/>
+                <a:ea typeface="Calibri" pitchFamily="34" charset="-122"/>
+                <a:cs typeface="Calibri" pitchFamily="34" charset="-120"/>
+              </a:rPr>
+              <a:t>2023 General Election</a:t>
             </a:r>
             <a:endParaRPr lang="en-US" sz="900" dirty="0"/>
           </a:p>
@@ -13163,7 +13113,7 @@
                 <a:ea typeface="Calibri" pitchFamily="34" charset="-122"/>
                 <a:cs typeface="Calibri" pitchFamily="34" charset="-120"/>
               </a:rPr>
-              <a:t>How do we identify Ohio counties that behave similarly in terms of 2024 General Election results?</a:t>
+              <a:t>How do we identify counties that behave similarly in terms of election results?</a:t>
             </a:r>
             <a:endParaRPr lang="en-US" sz="1100" dirty="0"/>
           </a:p>
@@ -13202,7 +13152,7 @@
                 <a:ea typeface="Calibri" pitchFamily="34" charset="-122"/>
                 <a:cs typeface="Calibri" pitchFamily="34" charset="-120"/>
               </a:rPr>
-              <a:t>County segmentation · 88 Ohio counties · 2024 General</a:t>
+              <a:t>2024 General Election Results</a:t>
             </a:r>
             <a:endParaRPr lang="en-US" sz="900" dirty="0"/>
           </a:p>
@@ -13407,7 +13357,7 @@
                 <a:ea typeface="Calibri" pitchFamily="34" charset="-122"/>
                 <a:cs typeface="Calibri" pitchFamily="34" charset="-120"/>
               </a:rPr>
-              <a:t>How do we build audiences around Trump approval rating and Issue 1 vote results?</a:t>
+              <a:t>How do we build custom audiences?</a:t>
             </a:r>
             <a:endParaRPr lang="en-US" sz="1100" dirty="0"/>
           </a:p>
@@ -13434,9 +13384,6 @@
           <a:bodyPr wrap="square" lIns="0" tIns="0" rIns="0" bIns="0" rtlCol="0" anchor="ctr"/>
           <a:lstStyle/>
           <a:p>
-            <a:pPr marL="0" indent="0">
-              <a:buNone/>
-            </a:pPr>
             <a:r>
               <a:rPr lang="en-US" sz="900" dirty="0">
                 <a:solidFill>
@@ -13446,7 +13393,20 @@
                 <a:ea typeface="Calibri" pitchFamily="34" charset="-122"/>
                 <a:cs typeface="Calibri" pitchFamily="34" charset="-120"/>
               </a:rPr>
-              <a:t>Audience modeling · ~925 Ohio voter survey</a:t>
+              <a:t>Ohio Voter Survey</a:t>
+            </a:r>
+          </a:p>
+          <a:p>
+            <a:r>
+              <a:rPr lang="en-US" sz="900" dirty="0">
+                <a:solidFill>
+                  <a:srgbClr val="64748B"/>
+                </a:solidFill>
+                <a:latin typeface="Calibri" pitchFamily="34" charset="0"/>
+                <a:ea typeface="Calibri" pitchFamily="34" charset="-122"/>
+                <a:cs typeface="Calibri" pitchFamily="34" charset="-120"/>
+              </a:rPr>
+              <a:t>2023 General Election</a:t>
             </a:r>
             <a:endParaRPr lang="en-US" sz="900" dirty="0"/>
           </a:p>
@@ -14025,7 +13985,29 @@
                 <a:ea typeface="Calibri" pitchFamily="34" charset="-122"/>
                 <a:cs typeface="Calibri" pitchFamily="34" charset="-120"/>
               </a:rPr>
-              <a:t>issue1_score &gt; 0.6 AND trump_fav_score &lt; 0.4 → cross-pressured voters who backed Issue 1 but are skeptical of Trump.</a:t>
+              <a:t>issue1_score &gt; 0.6 AND </a:t>
+            </a:r>
+            <a:r>
+              <a:rPr lang="en-US" sz="1000" i="1" dirty="0" err="1">
+                <a:solidFill>
+                  <a:srgbClr val="1E2761"/>
+                </a:solidFill>
+                <a:latin typeface="Calibri" pitchFamily="34" charset="0"/>
+                <a:ea typeface="Calibri" pitchFamily="34" charset="-122"/>
+                <a:cs typeface="Calibri" pitchFamily="34" charset="-120"/>
+              </a:rPr>
+              <a:t>trump_fav_score</a:t>
+            </a:r>
+            <a:r>
+              <a:rPr lang="en-US" sz="1000" i="1" dirty="0">
+                <a:solidFill>
+                  <a:srgbClr val="1E2761"/>
+                </a:solidFill>
+                <a:latin typeface="Calibri" pitchFamily="34" charset="0"/>
+                <a:ea typeface="Calibri" pitchFamily="34" charset="-122"/>
+                <a:cs typeface="Calibri" pitchFamily="34" charset="-120"/>
+              </a:rPr>
+              <a:t> &gt; 0.6 → cross-pressured voters who backed Issue 1 but are pro Trump.</a:t>
             </a:r>
             <a:endParaRPr lang="en-US" sz="1000" dirty="0"/>
           </a:p>
@@ -16372,52 +16354,13 @@
       </p:sp>
       <p:sp>
         <p:nvSpPr>
-          <p:cNvPr id="8" name="Text 6"/>
-          <p:cNvSpPr/>
-          <p:nvPr/>
-        </p:nvSpPr>
-        <p:spPr>
-          <a:xfrm>
-            <a:off x="429768" y="1216152"/>
-            <a:ext cx="2468880" cy="237744"/>
-          </a:xfrm>
-          <a:prstGeom prst="rect">
-            <a:avLst/>
-          </a:prstGeom>
-          <a:noFill/>
-          <a:ln/>
-        </p:spPr>
-        <p:txBody>
-          <a:bodyPr wrap="square" lIns="0" tIns="0" rIns="0" bIns="0" rtlCol="0" anchor="ctr"/>
-          <a:lstStyle/>
-          <a:p>
-            <a:pPr marL="0" indent="0">
-              <a:buNone/>
-            </a:pPr>
-            <a:r>
-              <a:rPr lang="en-US" sz="800" b="1" dirty="0">
-                <a:solidFill>
-                  <a:srgbClr val="64748B"/>
-                </a:solidFill>
-                <a:latin typeface="Calibri" pitchFamily="34" charset="0"/>
-                <a:ea typeface="Calibri" pitchFamily="34" charset="-122"/>
-                <a:cs typeface="Calibri" pitchFamily="34" charset="-120"/>
-              </a:rPr>
-              <a:t>In this session</a:t>
-            </a:r>
-            <a:endParaRPr lang="en-US" sz="800" dirty="0"/>
-          </a:p>
-        </p:txBody>
-      </p:sp>
-      <p:sp>
-        <p:nvSpPr>
           <p:cNvPr id="9" name="Text 7"/>
           <p:cNvSpPr/>
           <p:nvPr/>
         </p:nvSpPr>
         <p:spPr>
           <a:xfrm>
-            <a:off x="429768" y="1453896"/>
+            <a:off x="429768" y="1342066"/>
             <a:ext cx="2468880" cy="530352"/>
           </a:xfrm>
           <a:prstGeom prst="rect">
@@ -17052,52 +16995,13 @@
       </p:sp>
       <p:sp>
         <p:nvSpPr>
-          <p:cNvPr id="27" name="Text 25"/>
-          <p:cNvSpPr/>
-          <p:nvPr/>
-        </p:nvSpPr>
-        <p:spPr>
-          <a:xfrm>
-            <a:off x="3264408" y="1216152"/>
-            <a:ext cx="2468880" cy="237744"/>
-          </a:xfrm>
-          <a:prstGeom prst="rect">
-            <a:avLst/>
-          </a:prstGeom>
-          <a:noFill/>
-          <a:ln/>
-        </p:spPr>
-        <p:txBody>
-          <a:bodyPr wrap="square" lIns="0" tIns="0" rIns="0" bIns="0" rtlCol="0" anchor="ctr"/>
-          <a:lstStyle/>
-          <a:p>
-            <a:pPr marL="0" indent="0">
-              <a:buNone/>
-            </a:pPr>
-            <a:r>
-              <a:rPr lang="en-US" sz="800" b="1" dirty="0">
-                <a:solidFill>
-                  <a:srgbClr val="64748B"/>
-                </a:solidFill>
-                <a:latin typeface="Calibri" pitchFamily="34" charset="0"/>
-                <a:ea typeface="Calibri" pitchFamily="34" charset="-122"/>
-                <a:cs typeface="Calibri" pitchFamily="34" charset="-120"/>
-              </a:rPr>
-              <a:t>In this session</a:t>
-            </a:r>
-            <a:endParaRPr lang="en-US" sz="800" dirty="0"/>
-          </a:p>
-        </p:txBody>
-      </p:sp>
-      <p:sp>
-        <p:nvSpPr>
           <p:cNvPr id="28" name="Text 26"/>
           <p:cNvSpPr/>
           <p:nvPr/>
         </p:nvSpPr>
         <p:spPr>
           <a:xfrm>
-            <a:off x="3264408" y="1453896"/>
+            <a:off x="3264408" y="1342066"/>
             <a:ext cx="2468880" cy="530352"/>
           </a:xfrm>
           <a:prstGeom prst="rect">
@@ -17731,52 +17635,13 @@
       </p:sp>
       <p:sp>
         <p:nvSpPr>
-          <p:cNvPr id="46" name="Text 44"/>
-          <p:cNvSpPr/>
-          <p:nvPr/>
-        </p:nvSpPr>
-        <p:spPr>
-          <a:xfrm>
-            <a:off x="6099048" y="1216152"/>
-            <a:ext cx="2468880" cy="237744"/>
-          </a:xfrm>
-          <a:prstGeom prst="rect">
-            <a:avLst/>
-          </a:prstGeom>
-          <a:noFill/>
-          <a:ln/>
-        </p:spPr>
-        <p:txBody>
-          <a:bodyPr wrap="square" lIns="0" tIns="0" rIns="0" bIns="0" rtlCol="0" anchor="ctr"/>
-          <a:lstStyle/>
-          <a:p>
-            <a:pPr marL="0" indent="0">
-              <a:buNone/>
-            </a:pPr>
-            <a:r>
-              <a:rPr lang="en-US" sz="800" b="1" dirty="0">
-                <a:solidFill>
-                  <a:srgbClr val="64748B"/>
-                </a:solidFill>
-                <a:latin typeface="Calibri" pitchFamily="34" charset="0"/>
-                <a:ea typeface="Calibri" pitchFamily="34" charset="-122"/>
-                <a:cs typeface="Calibri" pitchFamily="34" charset="-120"/>
-              </a:rPr>
-              <a:t>In this session</a:t>
-            </a:r>
-            <a:endParaRPr lang="en-US" sz="800" dirty="0"/>
-          </a:p>
-        </p:txBody>
-      </p:sp>
-      <p:sp>
-        <p:nvSpPr>
           <p:cNvPr id="47" name="Text 45"/>
           <p:cNvSpPr/>
           <p:nvPr/>
         </p:nvSpPr>
         <p:spPr>
           <a:xfrm>
-            <a:off x="6099048" y="1453896"/>
+            <a:off x="6099048" y="1342066"/>
             <a:ext cx="2468880" cy="530352"/>
           </a:xfrm>
           <a:prstGeom prst="rect">
@@ -18847,7 +18712,7 @@
                 <a:ea typeface="Calibri" pitchFamily="34" charset="-122"/>
                 <a:cs typeface="Calibri" pitchFamily="34" charset="-120"/>
               </a:rPr>
-              <a:t>Ad spending  ·  Voter recall  ·  Issue 1 campaign  ·  2023 General</a:t>
+              <a:t>Issue 1 campaign  ·  2023 General</a:t>
             </a:r>
             <a:endParaRPr lang="en-US" sz="1500" dirty="0"/>
           </a:p>
@@ -19294,7 +19159,7 @@
                 <a:ea typeface="Calibri" pitchFamily="34" charset="-122"/>
                 <a:cs typeface="Calibri" pitchFamily="34" charset="-120"/>
               </a:rPr>
-              <a:t>NO-side ads</a:t>
+              <a:t>NO-side ads (Pro-Life)</a:t>
             </a:r>
             <a:endParaRPr lang="en-US" sz="1100" dirty="0"/>
           </a:p>
@@ -19399,7 +19264,7 @@
                 <a:ea typeface="Calibri" pitchFamily="34" charset="-122"/>
                 <a:cs typeface="Calibri" pitchFamily="34" charset="-120"/>
               </a:rPr>
-              <a:t>YES-side ads</a:t>
+              <a:t>YES-side ads (Pro-Choice)</a:t>
             </a:r>
             <a:endParaRPr lang="en-US" sz="1100" dirty="0"/>
           </a:p>
@@ -22626,7 +22491,7 @@
                 <a:ea typeface="Calibri" pitchFamily="34" charset="-122"/>
                 <a:cs typeface="Calibri" pitchFamily="34" charset="-120"/>
               </a:rPr>
-              <a:t>No statistics background needed — think of it as finding the line that best captures the pattern in a scatter plot.</a:t>
+              <a:t>Think of it as finding the line that best captures the pattern in a scatter plot.</a:t>
             </a:r>
             <a:endParaRPr lang="en-US" sz="1000" dirty="0"/>
           </a:p>
@@ -23155,8 +23020,8 @@
         </p:blipFill>
         <p:spPr>
           <a:xfrm>
-            <a:off x="274320" y="822960"/>
-            <a:ext cx="5212080" cy="3931920"/>
+            <a:off x="274319" y="841248"/>
+            <a:ext cx="5422589" cy="3913632"/>
           </a:xfrm>
           <a:prstGeom prst="rect">
             <a:avLst/>
@@ -23401,7 +23266,58 @@
                 <a:ea typeface="Calibri" pitchFamily="34" charset="-122"/>
                 <a:cs typeface="Calibri" pitchFamily="34" charset="-120"/>
               </a:rPr>
-              <a:t>Higher spending → higher recall. But some ads punch above their weight while others underperform — that gap is what we measure.</a:t>
+              <a:t>Higher spending → higher recall. </a:t>
+            </a:r>
+          </a:p>
+          <a:p>
+            <a:pPr marL="0" indent="0">
+              <a:buNone/>
+            </a:pPr>
+            <a:endParaRPr lang="en-US" sz="1100" dirty="0">
+              <a:solidFill>
+                <a:srgbClr val="2D3748"/>
+              </a:solidFill>
+              <a:latin typeface="Calibri" pitchFamily="34" charset="0"/>
+              <a:ea typeface="Calibri" pitchFamily="34" charset="-122"/>
+              <a:cs typeface="Calibri" pitchFamily="34" charset="-120"/>
+            </a:endParaRPr>
+          </a:p>
+          <a:p>
+            <a:pPr marL="0" indent="0">
+              <a:buNone/>
+            </a:pPr>
+            <a:r>
+              <a:rPr lang="en-US" sz="1100" dirty="0">
+                <a:solidFill>
+                  <a:srgbClr val="2D3748"/>
+                </a:solidFill>
+                <a:latin typeface="Calibri" pitchFamily="34" charset="0"/>
+                <a:ea typeface="Calibri" pitchFamily="34" charset="-122"/>
+                <a:cs typeface="Calibri" pitchFamily="34" charset="-120"/>
+              </a:rPr>
+              <a:t>Some ads punch above their weight while others underperform — </a:t>
+            </a:r>
+            <a:r>
+              <a:rPr lang="en-US" sz="1100" i="1" dirty="0">
+                <a:solidFill>
+                  <a:srgbClr val="2D3748"/>
+                </a:solidFill>
+                <a:latin typeface="Calibri" pitchFamily="34" charset="0"/>
+                <a:ea typeface="Calibri" pitchFamily="34" charset="-122"/>
+                <a:cs typeface="Calibri" pitchFamily="34" charset="-120"/>
+              </a:rPr>
+              <a:t>that gap is what we measure</a:t>
+            </a:r>
+            <a:r>
+              <a:rPr lang="en-US" sz="1100" dirty="0">
+                <a:solidFill>
+                  <a:srgbClr val="2D3748"/>
+                </a:solidFill>
+                <a:latin typeface="Calibri" pitchFamily="34" charset="0"/>
+                <a:ea typeface="Calibri" pitchFamily="34" charset="-122"/>
+                <a:cs typeface="Calibri" pitchFamily="34" charset="-120"/>
+              </a:rPr>
+              <a:t>.</a:t>
             </a:r>
             <a:endParaRPr lang="en-US" sz="1100" dirty="0"/>
           </a:p>
@@ -23832,7 +23748,7 @@
                 <a:ea typeface="Calibri" pitchFamily="34" charset="-122"/>
                 <a:cs typeface="Calibri" pitchFamily="34" charset="-120"/>
               </a:rPr>
-              <a:t>Predict expected recall from spending</a:t>
+              <a:t>Predict expected spend from recall</a:t>
             </a:r>
             <a:endParaRPr lang="en-US" sz="900" dirty="0"/>
           </a:p>
@@ -23986,7 +23902,7 @@
                 <a:ea typeface="Calibri" pitchFamily="34" charset="-122"/>
                 <a:cs typeface="Calibri" pitchFamily="34" charset="-120"/>
               </a:rPr>
-              <a:t>Predict expected spend from recall</a:t>
+              <a:t>Predict expected recall from spend</a:t>
             </a:r>
             <a:endParaRPr lang="en-US" sz="900" dirty="0"/>
           </a:p>
@@ -24854,7 +24770,7 @@
                 <a:ea typeface="Calibri" pitchFamily="34" charset="-122"/>
                 <a:cs typeface="Calibri" pitchFamily="34" charset="-120"/>
               </a:rPr>
-              <a:t>88 Ohio counties  ·  Trump percentile  ·  Turnout percentile  ·  2024 General</a:t>
+              <a:t>2024 General</a:t>
             </a:r>
             <a:endParaRPr lang="en-US" sz="1500" dirty="0"/>
           </a:p>
